--- a/figures/Figure_1.pptx
+++ b/figures/Figure_1.pptx
@@ -243,7 +243,7 @@
           <a:p>
             <a:fld id="{ED160DB6-C0DC-8946-AD05-C0754294CFDE}" type="datetimeFigureOut">
               <a:rPr lang="fr-FR" smtClean="0"/>
-              <a:t>16/07/2025</a:t>
+              <a:t>29/07/2025</a:t>
             </a:fld>
             <a:endParaRPr lang="fr-FR"/>
           </a:p>
@@ -413,7 +413,7 @@
           <a:p>
             <a:fld id="{ED160DB6-C0DC-8946-AD05-C0754294CFDE}" type="datetimeFigureOut">
               <a:rPr lang="fr-FR" smtClean="0"/>
-              <a:t>16/07/2025</a:t>
+              <a:t>29/07/2025</a:t>
             </a:fld>
             <a:endParaRPr lang="fr-FR"/>
           </a:p>
@@ -593,7 +593,7 @@
           <a:p>
             <a:fld id="{ED160DB6-C0DC-8946-AD05-C0754294CFDE}" type="datetimeFigureOut">
               <a:rPr lang="fr-FR" smtClean="0"/>
-              <a:t>16/07/2025</a:t>
+              <a:t>29/07/2025</a:t>
             </a:fld>
             <a:endParaRPr lang="fr-FR"/>
           </a:p>
@@ -763,7 +763,7 @@
           <a:p>
             <a:fld id="{ED160DB6-C0DC-8946-AD05-C0754294CFDE}" type="datetimeFigureOut">
               <a:rPr lang="fr-FR" smtClean="0"/>
-              <a:t>16/07/2025</a:t>
+              <a:t>29/07/2025</a:t>
             </a:fld>
             <a:endParaRPr lang="fr-FR"/>
           </a:p>
@@ -1007,7 +1007,7 @@
           <a:p>
             <a:fld id="{ED160DB6-C0DC-8946-AD05-C0754294CFDE}" type="datetimeFigureOut">
               <a:rPr lang="fr-FR" smtClean="0"/>
-              <a:t>16/07/2025</a:t>
+              <a:t>29/07/2025</a:t>
             </a:fld>
             <a:endParaRPr lang="fr-FR"/>
           </a:p>
@@ -1239,7 +1239,7 @@
           <a:p>
             <a:fld id="{ED160DB6-C0DC-8946-AD05-C0754294CFDE}" type="datetimeFigureOut">
               <a:rPr lang="fr-FR" smtClean="0"/>
-              <a:t>16/07/2025</a:t>
+              <a:t>29/07/2025</a:t>
             </a:fld>
             <a:endParaRPr lang="fr-FR"/>
           </a:p>
@@ -1606,7 +1606,7 @@
           <a:p>
             <a:fld id="{ED160DB6-C0DC-8946-AD05-C0754294CFDE}" type="datetimeFigureOut">
               <a:rPr lang="fr-FR" smtClean="0"/>
-              <a:t>16/07/2025</a:t>
+              <a:t>29/07/2025</a:t>
             </a:fld>
             <a:endParaRPr lang="fr-FR"/>
           </a:p>
@@ -1724,7 +1724,7 @@
           <a:p>
             <a:fld id="{ED160DB6-C0DC-8946-AD05-C0754294CFDE}" type="datetimeFigureOut">
               <a:rPr lang="fr-FR" smtClean="0"/>
-              <a:t>16/07/2025</a:t>
+              <a:t>29/07/2025</a:t>
             </a:fld>
             <a:endParaRPr lang="fr-FR"/>
           </a:p>
@@ -1819,7 +1819,7 @@
           <a:p>
             <a:fld id="{ED160DB6-C0DC-8946-AD05-C0754294CFDE}" type="datetimeFigureOut">
               <a:rPr lang="fr-FR" smtClean="0"/>
-              <a:t>16/07/2025</a:t>
+              <a:t>29/07/2025</a:t>
             </a:fld>
             <a:endParaRPr lang="fr-FR"/>
           </a:p>
@@ -2096,7 +2096,7 @@
           <a:p>
             <a:fld id="{ED160DB6-C0DC-8946-AD05-C0754294CFDE}" type="datetimeFigureOut">
               <a:rPr lang="fr-FR" smtClean="0"/>
-              <a:t>16/07/2025</a:t>
+              <a:t>29/07/2025</a:t>
             </a:fld>
             <a:endParaRPr lang="fr-FR"/>
           </a:p>
@@ -2353,7 +2353,7 @@
           <a:p>
             <a:fld id="{ED160DB6-C0DC-8946-AD05-C0754294CFDE}" type="datetimeFigureOut">
               <a:rPr lang="fr-FR" smtClean="0"/>
-              <a:t>16/07/2025</a:t>
+              <a:t>29/07/2025</a:t>
             </a:fld>
             <a:endParaRPr lang="fr-FR"/>
           </a:p>
@@ -2566,7 +2566,7 @@
           <a:p>
             <a:fld id="{ED160DB6-C0DC-8946-AD05-C0754294CFDE}" type="datetimeFigureOut">
               <a:rPr lang="fr-FR" smtClean="0"/>
-              <a:t>16/07/2025</a:t>
+              <a:t>29/07/2025</a:t>
             </a:fld>
             <a:endParaRPr lang="fr-FR"/>
           </a:p>
@@ -2971,12 +2971,117 @@
           <a:chExt cx="0" cy="0"/>
         </a:xfrm>
       </p:grpSpPr>
+      <p:sp>
+        <p:nvSpPr>
+          <p:cNvPr id="20" name="ZoneTexte 19">
+            <a:extLst>
+              <a:ext uri="{FF2B5EF4-FFF2-40B4-BE49-F238E27FC236}">
+                <a16:creationId xmlns:a16="http://schemas.microsoft.com/office/drawing/2014/main" id="{72E01FBA-D518-D770-65C9-CA3D02D9B0E7}"/>
+              </a:ext>
+            </a:extLst>
+          </p:cNvPr>
+          <p:cNvSpPr txBox="1"/>
+          <p:nvPr/>
+        </p:nvSpPr>
+        <p:spPr>
+          <a:xfrm>
+            <a:off x="953" y="0"/>
+            <a:ext cx="277640" cy="184666"/>
+          </a:xfrm>
+          <a:prstGeom prst="rect">
+            <a:avLst/>
+          </a:prstGeom>
+          <a:noFill/>
+        </p:spPr>
+        <p:txBody>
+          <a:bodyPr wrap="none" rtlCol="0">
+            <a:spAutoFit/>
+          </a:bodyPr>
+          <a:lstStyle/>
+          <a:p>
+            <a:r>
+              <a:rPr lang="fr-FR" sz="600" b="1" dirty="0"/>
+              <a:t>(A)</a:t>
+            </a:r>
+          </a:p>
+        </p:txBody>
+      </p:sp>
+      <p:sp>
+        <p:nvSpPr>
+          <p:cNvPr id="21" name="ZoneTexte 20">
+            <a:extLst>
+              <a:ext uri="{FF2B5EF4-FFF2-40B4-BE49-F238E27FC236}">
+                <a16:creationId xmlns:a16="http://schemas.microsoft.com/office/drawing/2014/main" id="{E9497EF0-316A-9BAC-0EAA-1C79FD33B1B2}"/>
+              </a:ext>
+            </a:extLst>
+          </p:cNvPr>
+          <p:cNvSpPr txBox="1"/>
+          <p:nvPr/>
+        </p:nvSpPr>
+        <p:spPr>
+          <a:xfrm>
+            <a:off x="1017173" y="3088"/>
+            <a:ext cx="274434" cy="184666"/>
+          </a:xfrm>
+          <a:prstGeom prst="rect">
+            <a:avLst/>
+          </a:prstGeom>
+          <a:noFill/>
+        </p:spPr>
+        <p:txBody>
+          <a:bodyPr wrap="none" rtlCol="0">
+            <a:spAutoFit/>
+          </a:bodyPr>
+          <a:lstStyle/>
+          <a:p>
+            <a:r>
+              <a:rPr lang="fr-FR" sz="600" b="1" dirty="0"/>
+              <a:t>(B)</a:t>
+            </a:r>
+          </a:p>
+        </p:txBody>
+      </p:sp>
+      <p:sp>
+        <p:nvSpPr>
+          <p:cNvPr id="24" name="ZoneTexte 23">
+            <a:extLst>
+              <a:ext uri="{FF2B5EF4-FFF2-40B4-BE49-F238E27FC236}">
+                <a16:creationId xmlns:a16="http://schemas.microsoft.com/office/drawing/2014/main" id="{F0556C2E-EB1B-9628-4126-6B04AB317219}"/>
+              </a:ext>
+            </a:extLst>
+          </p:cNvPr>
+          <p:cNvSpPr txBox="1"/>
+          <p:nvPr/>
+        </p:nvSpPr>
+        <p:spPr>
+          <a:xfrm>
+            <a:off x="2020600" y="0"/>
+            <a:ext cx="274434" cy="184666"/>
+          </a:xfrm>
+          <a:prstGeom prst="rect">
+            <a:avLst/>
+          </a:prstGeom>
+          <a:noFill/>
+        </p:spPr>
+        <p:txBody>
+          <a:bodyPr wrap="none" rtlCol="0">
+            <a:spAutoFit/>
+          </a:bodyPr>
+          <a:lstStyle/>
+          <a:p>
+            <a:r>
+              <a:rPr lang="fr-FR" sz="600" b="1" dirty="0"/>
+              <a:t>(C)</a:t>
+            </a:r>
+          </a:p>
+        </p:txBody>
+      </p:sp>
       <p:pic>
         <p:nvPicPr>
-          <p:cNvPr id="7" name="Image 6">
+          <p:cNvPr id="3" name="Image 2">
             <a:extLst>
               <a:ext uri="{FF2B5EF4-FFF2-40B4-BE49-F238E27FC236}">
-                <a16:creationId xmlns:a16="http://schemas.microsoft.com/office/drawing/2014/main" id="{68168948-44FA-03F0-5B5B-DC6E672FD967}"/>
+                <a16:creationId xmlns:a16="http://schemas.microsoft.com/office/drawing/2014/main" id="{CB7CC8EE-C991-70BA-EC7E-21C6EC248039}"/>
               </a:ext>
             </a:extLst>
           </p:cNvPr>
@@ -2993,142 +3098,7 @@
         </p:blipFill>
         <p:spPr>
           <a:xfrm>
-            <a:off x="67524" y="5258"/>
-            <a:ext cx="3060700" cy="1530351"/>
-          </a:xfrm>
-          <a:prstGeom prst="rect">
-            <a:avLst/>
-          </a:prstGeom>
-        </p:spPr>
-      </p:pic>
-      <p:sp>
-        <p:nvSpPr>
-          <p:cNvPr id="20" name="ZoneTexte 19">
-            <a:extLst>
-              <a:ext uri="{FF2B5EF4-FFF2-40B4-BE49-F238E27FC236}">
-                <a16:creationId xmlns:a16="http://schemas.microsoft.com/office/drawing/2014/main" id="{72E01FBA-D518-D770-65C9-CA3D02D9B0E7}"/>
-              </a:ext>
-            </a:extLst>
-          </p:cNvPr>
-          <p:cNvSpPr txBox="1"/>
-          <p:nvPr/>
-        </p:nvSpPr>
-        <p:spPr>
-          <a:xfrm>
-            <a:off x="953" y="0"/>
-            <a:ext cx="277640" cy="184666"/>
-          </a:xfrm>
-          <a:prstGeom prst="rect">
-            <a:avLst/>
-          </a:prstGeom>
-          <a:noFill/>
-        </p:spPr>
-        <p:txBody>
-          <a:bodyPr wrap="none" rtlCol="0">
-            <a:spAutoFit/>
-          </a:bodyPr>
-          <a:lstStyle/>
-          <a:p>
-            <a:r>
-              <a:rPr lang="fr-FR" sz="600" b="1" dirty="0"/>
-              <a:t>(A)</a:t>
-            </a:r>
-          </a:p>
-        </p:txBody>
-      </p:sp>
-      <p:sp>
-        <p:nvSpPr>
-          <p:cNvPr id="21" name="ZoneTexte 20">
-            <a:extLst>
-              <a:ext uri="{FF2B5EF4-FFF2-40B4-BE49-F238E27FC236}">
-                <a16:creationId xmlns:a16="http://schemas.microsoft.com/office/drawing/2014/main" id="{E9497EF0-316A-9BAC-0EAA-1C79FD33B1B2}"/>
-              </a:ext>
-            </a:extLst>
-          </p:cNvPr>
-          <p:cNvSpPr txBox="1"/>
-          <p:nvPr/>
-        </p:nvSpPr>
-        <p:spPr>
-          <a:xfrm>
-            <a:off x="1017173" y="3088"/>
-            <a:ext cx="274434" cy="184666"/>
-          </a:xfrm>
-          <a:prstGeom prst="rect">
-            <a:avLst/>
-          </a:prstGeom>
-          <a:noFill/>
-        </p:spPr>
-        <p:txBody>
-          <a:bodyPr wrap="none" rtlCol="0">
-            <a:spAutoFit/>
-          </a:bodyPr>
-          <a:lstStyle/>
-          <a:p>
-            <a:r>
-              <a:rPr lang="fr-FR" sz="600" b="1" dirty="0"/>
-              <a:t>(B)</a:t>
-            </a:r>
-          </a:p>
-        </p:txBody>
-      </p:sp>
-      <p:sp>
-        <p:nvSpPr>
-          <p:cNvPr id="24" name="ZoneTexte 23">
-            <a:extLst>
-              <a:ext uri="{FF2B5EF4-FFF2-40B4-BE49-F238E27FC236}">
-                <a16:creationId xmlns:a16="http://schemas.microsoft.com/office/drawing/2014/main" id="{F0556C2E-EB1B-9628-4126-6B04AB317219}"/>
-              </a:ext>
-            </a:extLst>
-          </p:cNvPr>
-          <p:cNvSpPr txBox="1"/>
-          <p:nvPr/>
-        </p:nvSpPr>
-        <p:spPr>
-          <a:xfrm>
-            <a:off x="2020600" y="0"/>
-            <a:ext cx="274434" cy="184666"/>
-          </a:xfrm>
-          <a:prstGeom prst="rect">
-            <a:avLst/>
-          </a:prstGeom>
-          <a:noFill/>
-        </p:spPr>
-        <p:txBody>
-          <a:bodyPr wrap="none" rtlCol="0">
-            <a:spAutoFit/>
-          </a:bodyPr>
-          <a:lstStyle/>
-          <a:p>
-            <a:r>
-              <a:rPr lang="fr-FR" sz="600" b="1" dirty="0"/>
-              <a:t>(C)</a:t>
-            </a:r>
-          </a:p>
-        </p:txBody>
-      </p:sp>
-      <p:pic>
-        <p:nvPicPr>
-          <p:cNvPr id="3" name="Image 2">
-            <a:extLst>
-              <a:ext uri="{FF2B5EF4-FFF2-40B4-BE49-F238E27FC236}">
-                <a16:creationId xmlns:a16="http://schemas.microsoft.com/office/drawing/2014/main" id="{CB7CC8EE-C991-70BA-EC7E-21C6EC248039}"/>
-              </a:ext>
-            </a:extLst>
-          </p:cNvPr>
-          <p:cNvPicPr>
-            <a:picLocks noChangeAspect="1"/>
-          </p:cNvPicPr>
-          <p:nvPr/>
-        </p:nvPicPr>
-        <p:blipFill>
-          <a:blip r:embed="rId3"/>
-          <a:stretch>
-            <a:fillRect/>
-          </a:stretch>
-        </p:blipFill>
-        <p:spPr>
-          <a:xfrm>
-            <a:off x="1597874" y="1341744"/>
+            <a:off x="1609962" y="1322506"/>
             <a:ext cx="1421311" cy="1421311"/>
           </a:xfrm>
           <a:prstGeom prst="rect">
@@ -3151,7 +3121,7 @@
           <p:nvPr/>
         </p:nvPicPr>
         <p:blipFill>
-          <a:blip r:embed="rId4"/>
+          <a:blip r:embed="rId3"/>
           <a:stretch>
             <a:fillRect/>
           </a:stretch>
@@ -3181,7 +3151,7 @@
           <p:nvPr/>
         </p:nvPicPr>
         <p:blipFill>
-          <a:blip r:embed="rId5"/>
+          <a:blip r:embed="rId4"/>
           <a:stretch>
             <a:fillRect/>
           </a:stretch>
@@ -3353,6 +3323,36 @@
           </a:p>
         </p:txBody>
       </p:sp>
+      <p:pic>
+        <p:nvPicPr>
+          <p:cNvPr id="4" name="Image 3">
+            <a:extLst>
+              <a:ext uri="{FF2B5EF4-FFF2-40B4-BE49-F238E27FC236}">
+                <a16:creationId xmlns:a16="http://schemas.microsoft.com/office/drawing/2014/main" id="{A8E51BD2-F738-9EEA-D167-0BF56F4AF5FD}"/>
+              </a:ext>
+            </a:extLst>
+          </p:cNvPr>
+          <p:cNvPicPr>
+            <a:picLocks noChangeAspect="1"/>
+          </p:cNvPicPr>
+          <p:nvPr/>
+        </p:nvPicPr>
+        <p:blipFill>
+          <a:blip r:embed="rId5"/>
+          <a:stretch>
+            <a:fillRect/>
+          </a:stretch>
+        </p:blipFill>
+        <p:spPr>
+          <a:xfrm>
+            <a:off x="0" y="-3475"/>
+            <a:ext cx="3060700" cy="1530350"/>
+          </a:xfrm>
+          <a:prstGeom prst="rect">
+            <a:avLst/>
+          </a:prstGeom>
+        </p:spPr>
+      </p:pic>
     </p:spTree>
     <p:extLst>
       <p:ext uri="{BB962C8B-B14F-4D97-AF65-F5344CB8AC3E}">
